--- a/docs/phi-lab-admin-manual.pptx
+++ b/docs/phi-lab-admin-manual.pptx
@@ -13841,7 +13841,7 @@
                 <a:ea typeface="Malgun Gothic" pitchFamily="34" charset="-122"/>
                 <a:cs typeface="Malgun Gothic" pitchFamily="34" charset="-120"/>
               </a:rPr>
-              <a:t>보안 정책(RLS)  </a:t>
+              <a:t>공동 운영  </a:t>
             </a:r>
             <a:pPr indent="0" marL="0">
               <a:buNone/>
@@ -13855,7 +13855,7 @@
                 <a:ea typeface="Malgun Gothic" pitchFamily="34" charset="-122"/>
                 <a:cs typeface="Malgun Gothic" pitchFamily="34" charset="-120"/>
               </a:rPr>
-              <a:t>수정·삭제는 ‘본인이 쓴 글’ 또는 ‘에디터’만 가능합니다. 남의 글은 함부로 지울 수 없게 되어 있습니다.</a:t>
+              <a:t>News · Gallery · Posts 는 화이트리스트 구성원이면 누구나 수정·삭제할 수 있습니다(작성자가 아니어도 OK). 대신 삭제는 되돌리기 어려우니 신중히.</a:t>
             </a:r>
             <a:endParaRPr lang="en-US" sz="1300" dirty="0"/>
           </a:p>
